--- a/IRC_Midterm_Redesigned_EN.pptx
+++ b/IRC_Midterm_Redesigned_EN.pptx
@@ -447,7 +447,7 @@
           <a:lstStyle xmlns:a="http://schemas.openxmlformats.org/drawingml/2006/main"/>
           <a:p xmlns:a="http://schemas.openxmlformats.org/drawingml/2006/main">
             <a:r>
-              <a:t>Good morning. This is our midterm progress report for the socket programming coursework. We have implemented the shared IRC protocol layer, a command Bot, and a lightweight server using Python sockets. I will explain the required behavior and how our current code provides it.</a:t>
+              <a:t>Good morning. This is our midterm progress report for the socket programming project. We have implemented the shared IRC protocol layer, a command Bot, and a lightweight server using Python sockets. I will explain the required behavior and how our current code provides it.</a:t>
             </a:r>
           </a:p>
           <a:p xmlns:a="http://schemas.openxmlformats.org/drawingml/2006/main">
